--- a/1 SEMESTRE/Projeto Integrador/Pitch.pptx
+++ b/1 SEMESTRE/Projeto Integrador/Pitch.pptx
@@ -292,7 +292,7 @@
           <a:p>
             <a:fld id="{E3921FFE-0C8E-4CDC-A06F-03EA2A404855}" type="datetimeFigureOut">
               <a:rPr lang="pt-BR" smtClean="0"/>
-              <a:t>16/06/2026</a:t>
+              <a:t>18/06/2026</a:t>
             </a:fld>
             <a:endParaRPr lang="pt-BR"/>
           </a:p>
@@ -705,7 +705,7 @@
           <a:p>
             <a:fld id="{E3921FFE-0C8E-4CDC-A06F-03EA2A404855}" type="datetimeFigureOut">
               <a:rPr lang="pt-BR" smtClean="0"/>
-              <a:t>16/06/2026</a:t>
+              <a:t>18/06/2026</a:t>
             </a:fld>
             <a:endParaRPr lang="pt-BR"/>
           </a:p>
@@ -968,7 +968,7 @@
           <a:p>
             <a:fld id="{E3921FFE-0C8E-4CDC-A06F-03EA2A404855}" type="datetimeFigureOut">
               <a:rPr lang="pt-BR" smtClean="0"/>
-              <a:t>16/06/2026</a:t>
+              <a:t>18/06/2026</a:t>
             </a:fld>
             <a:endParaRPr lang="pt-BR"/>
           </a:p>
@@ -1221,7 +1221,7 @@
           <a:p>
             <a:fld id="{E3921FFE-0C8E-4CDC-A06F-03EA2A404855}" type="datetimeFigureOut">
               <a:rPr lang="pt-BR" smtClean="0"/>
-              <a:t>16/06/2026</a:t>
+              <a:t>18/06/2026</a:t>
             </a:fld>
             <a:endParaRPr lang="pt-BR"/>
           </a:p>
@@ -1587,7 +1587,7 @@
           <a:p>
             <a:fld id="{E3921FFE-0C8E-4CDC-A06F-03EA2A404855}" type="datetimeFigureOut">
               <a:rPr lang="pt-BR" smtClean="0"/>
-              <a:t>16/06/2026</a:t>
+              <a:t>18/06/2026</a:t>
             </a:fld>
             <a:endParaRPr lang="pt-BR"/>
           </a:p>
@@ -2064,7 +2064,7 @@
           <a:p>
             <a:fld id="{E3921FFE-0C8E-4CDC-A06F-03EA2A404855}" type="datetimeFigureOut">
               <a:rPr lang="pt-BR" smtClean="0"/>
-              <a:t>16/06/2026</a:t>
+              <a:t>18/06/2026</a:t>
             </a:fld>
             <a:endParaRPr lang="pt-BR"/>
           </a:p>
@@ -2624,7 +2624,7 @@
           <a:p>
             <a:fld id="{E3921FFE-0C8E-4CDC-A06F-03EA2A404855}" type="datetimeFigureOut">
               <a:rPr lang="pt-BR" smtClean="0"/>
-              <a:t>16/06/2026</a:t>
+              <a:t>18/06/2026</a:t>
             </a:fld>
             <a:endParaRPr lang="pt-BR"/>
           </a:p>
@@ -2825,7 +2825,7 @@
           <a:p>
             <a:fld id="{E3921FFE-0C8E-4CDC-A06F-03EA2A404855}" type="datetimeFigureOut">
               <a:rPr lang="pt-BR" smtClean="0"/>
-              <a:t>16/06/2026</a:t>
+              <a:t>18/06/2026</a:t>
             </a:fld>
             <a:endParaRPr lang="pt-BR"/>
           </a:p>
@@ -3003,7 +3003,7 @@
           <a:p>
             <a:fld id="{E3921FFE-0C8E-4CDC-A06F-03EA2A404855}" type="datetimeFigureOut">
               <a:rPr lang="pt-BR" smtClean="0"/>
-              <a:t>16/06/2026</a:t>
+              <a:t>18/06/2026</a:t>
             </a:fld>
             <a:endParaRPr lang="pt-BR"/>
           </a:p>
@@ -3432,7 +3432,7 @@
           <a:p>
             <a:fld id="{E3921FFE-0C8E-4CDC-A06F-03EA2A404855}" type="datetimeFigureOut">
               <a:rPr lang="pt-BR" smtClean="0"/>
-              <a:t>16/06/2026</a:t>
+              <a:t>18/06/2026</a:t>
             </a:fld>
             <a:endParaRPr lang="pt-BR"/>
           </a:p>
@@ -3903,7 +3903,7 @@
           <a:p>
             <a:fld id="{E3921FFE-0C8E-4CDC-A06F-03EA2A404855}" type="datetimeFigureOut">
               <a:rPr lang="pt-BR" smtClean="0"/>
-              <a:t>16/06/2026</a:t>
+              <a:t>18/06/2026</a:t>
             </a:fld>
             <a:endParaRPr lang="pt-BR"/>
           </a:p>
@@ -4264,7 +4264,7 @@
           <a:p>
             <a:fld id="{E3921FFE-0C8E-4CDC-A06F-03EA2A404855}" type="datetimeFigureOut">
               <a:rPr lang="pt-BR" smtClean="0"/>
-              <a:t>16/06/2026</a:t>
+              <a:t>18/06/2026</a:t>
             </a:fld>
             <a:endParaRPr lang="pt-BR"/>
           </a:p>
@@ -4911,7 +4911,7 @@
         </p:spPr>
         <p:txBody>
           <a:bodyPr>
-            <a:normAutofit fontScale="47500" lnSpcReduction="20000"/>
+            <a:normAutofit fontScale="40000" lnSpcReduction="20000"/>
           </a:bodyPr>
           <a:lstStyle/>
           <a:p>
@@ -4949,6 +4949,13 @@
               <a:rPr lang="pt-BR" sz="2800" dirty="0"/>
               <a:t>WAGNER ALVES DE SOUZA</a:t>
             </a:r>
+          </a:p>
+          <a:p>
+            <a:r>
+              <a:rPr lang="pt-BR" sz="2800"/>
+              <a:t>NEANDRO BUENO VIEIRA</a:t>
+            </a:r>
+            <a:endParaRPr lang="pt-BR" sz="2800" dirty="0"/>
           </a:p>
           <a:p>
             <a:endParaRPr lang="pt-BR" dirty="0"/>
